--- a/1_docs/Concpet and Design.pptx
+++ b/1_docs/Concpet and Design.pptx
@@ -8,6 +8,7 @@
     <p:sldId id="256" r:id="rId2"/>
     <p:sldId id="257" r:id="rId3"/>
     <p:sldId id="258" r:id="rId4"/>
+    <p:sldId id="259" r:id="rId5"/>
   </p:sldIdLst>
   <p:sldSz cx="12192000" cy="6858000"/>
   <p:notesSz cx="6858000" cy="9144000"/>
@@ -114,6 +115,114 @@
 </p:presentation>
 </file>
 
+<file path=ppt/revisionInfo.xml><?xml version="1.0" encoding="utf-8"?>
+<p1510:revInfo xmlns:a="http://schemas.openxmlformats.org/drawingml/2006/main" xmlns:r="http://schemas.openxmlformats.org/officeDocument/2006/relationships" xmlns:p1510="http://schemas.microsoft.com/office/powerpoint/2015/10/main">
+  <p1510:revLst>
+    <p1510:client id="{167B45F0-D1E9-434D-A284-0B0DE586A1B6}" v="5" dt="2026-03-20T15:35:10.663"/>
+  </p1510:revLst>
+</p1510:revInfo>
+</file>
+
+<file path=ppt/changesInfos/changesInfo1.xml><?xml version="1.0" encoding="utf-8"?>
+<pc:chgInfo xmlns:a="http://schemas.openxmlformats.org/drawingml/2006/main" xmlns:r="http://schemas.openxmlformats.org/officeDocument/2006/relationships" xmlns:ac="http://schemas.microsoft.com/office/drawing/2013/main/command" xmlns:pc="http://schemas.microsoft.com/office/powerpoint/2013/main/command">
+  <pc:docChgLst>
+    <pc:chgData name="Jian Zhang" userId="0ea7bc01-89b9-4a71-a707-ff7cc5b2e1ce" providerId="ADAL" clId="{E4224710-4198-523A-A356-FE8CCFEBCD2A}"/>
+    <pc:docChg chg="undo custSel addSld modSld">
+      <pc:chgData name="Jian Zhang" userId="0ea7bc01-89b9-4a71-a707-ff7cc5b2e1ce" providerId="ADAL" clId="{E4224710-4198-523A-A356-FE8CCFEBCD2A}" dt="2026-03-20T15:38:36.525" v="728" actId="27636"/>
+      <pc:docMkLst>
+        <pc:docMk/>
+      </pc:docMkLst>
+      <pc:sldChg chg="modSp mod">
+        <pc:chgData name="Jian Zhang" userId="0ea7bc01-89b9-4a71-a707-ff7cc5b2e1ce" providerId="ADAL" clId="{E4224710-4198-523A-A356-FE8CCFEBCD2A}" dt="2026-03-20T15:37:56.727" v="724" actId="20577"/>
+        <pc:sldMkLst>
+          <pc:docMk/>
+          <pc:sldMk cId="3134355096" sldId="258"/>
+        </pc:sldMkLst>
+        <pc:spChg chg="mod">
+          <ac:chgData name="Jian Zhang" userId="0ea7bc01-89b9-4a71-a707-ff7cc5b2e1ce" providerId="ADAL" clId="{E4224710-4198-523A-A356-FE8CCFEBCD2A}" dt="2026-03-20T15:37:56.727" v="724" actId="20577"/>
+          <ac:spMkLst>
+            <pc:docMk/>
+            <pc:sldMk cId="3134355096" sldId="258"/>
+            <ac:spMk id="3" creationId="{72EB496D-2DA5-E7AA-BFA5-0F47E82607B2}"/>
+          </ac:spMkLst>
+        </pc:spChg>
+      </pc:sldChg>
+      <pc:sldChg chg="addSp delSp modSp new mod">
+        <pc:chgData name="Jian Zhang" userId="0ea7bc01-89b9-4a71-a707-ff7cc5b2e1ce" providerId="ADAL" clId="{E4224710-4198-523A-A356-FE8CCFEBCD2A}" dt="2026-03-20T15:38:36.525" v="728" actId="27636"/>
+        <pc:sldMkLst>
+          <pc:docMk/>
+          <pc:sldMk cId="4227997026" sldId="259"/>
+        </pc:sldMkLst>
+        <pc:spChg chg="mod">
+          <ac:chgData name="Jian Zhang" userId="0ea7bc01-89b9-4a71-a707-ff7cc5b2e1ce" providerId="ADAL" clId="{E4224710-4198-523A-A356-FE8CCFEBCD2A}" dt="2026-03-20T15:27:34.385" v="245" actId="20577"/>
+          <ac:spMkLst>
+            <pc:docMk/>
+            <pc:sldMk cId="4227997026" sldId="259"/>
+            <ac:spMk id="2" creationId="{72C39524-12CE-6E93-9CD3-4B5FBF82A2AF}"/>
+          </ac:spMkLst>
+        </pc:spChg>
+        <pc:spChg chg="add del mod">
+          <ac:chgData name="Jian Zhang" userId="0ea7bc01-89b9-4a71-a707-ff7cc5b2e1ce" providerId="ADAL" clId="{E4224710-4198-523A-A356-FE8CCFEBCD2A}" dt="2026-03-20T15:35:12.288" v="455" actId="478"/>
+          <ac:spMkLst>
+            <pc:docMk/>
+            <pc:sldMk cId="4227997026" sldId="259"/>
+            <ac:spMk id="3" creationId="{78636DEA-A84F-2388-58F9-069D2FCAF8BC}"/>
+          </ac:spMkLst>
+        </pc:spChg>
+        <pc:spChg chg="add mod">
+          <ac:chgData name="Jian Zhang" userId="0ea7bc01-89b9-4a71-a707-ff7cc5b2e1ce" providerId="ADAL" clId="{E4224710-4198-523A-A356-FE8CCFEBCD2A}" dt="2026-03-20T15:35:10.663" v="454" actId="164"/>
+          <ac:spMkLst>
+            <pc:docMk/>
+            <pc:sldMk cId="4227997026" sldId="259"/>
+            <ac:spMk id="6" creationId="{34B46B4D-F697-18D5-38C1-B3121513EEC2}"/>
+          </ac:spMkLst>
+        </pc:spChg>
+        <pc:spChg chg="add mod">
+          <ac:chgData name="Jian Zhang" userId="0ea7bc01-89b9-4a71-a707-ff7cc5b2e1ce" providerId="ADAL" clId="{E4224710-4198-523A-A356-FE8CCFEBCD2A}" dt="2026-03-20T15:38:36.525" v="728" actId="27636"/>
+          <ac:spMkLst>
+            <pc:docMk/>
+            <pc:sldMk cId="4227997026" sldId="259"/>
+            <ac:spMk id="7" creationId="{E85E7097-FABE-02F6-F8D1-334C54DDC2E5}"/>
+          </ac:spMkLst>
+        </pc:spChg>
+        <pc:spChg chg="add del mod">
+          <ac:chgData name="Jian Zhang" userId="0ea7bc01-89b9-4a71-a707-ff7cc5b2e1ce" providerId="ADAL" clId="{E4224710-4198-523A-A356-FE8CCFEBCD2A}" dt="2026-03-20T15:35:03.961" v="452" actId="478"/>
+          <ac:spMkLst>
+            <pc:docMk/>
+            <pc:sldMk cId="4227997026" sldId="259"/>
+            <ac:spMk id="9" creationId="{5069A575-17DC-5F3C-1BC5-0E99BBFB748D}"/>
+          </ac:spMkLst>
+        </pc:spChg>
+        <pc:spChg chg="add del mod">
+          <ac:chgData name="Jian Zhang" userId="0ea7bc01-89b9-4a71-a707-ff7cc5b2e1ce" providerId="ADAL" clId="{E4224710-4198-523A-A356-FE8CCFEBCD2A}" dt="2026-03-20T15:35:14.700" v="456" actId="478"/>
+          <ac:spMkLst>
+            <pc:docMk/>
+            <pc:sldMk cId="4227997026" sldId="259"/>
+            <ac:spMk id="12" creationId="{712801BF-79DE-7E42-A9E0-9FC40F071027}"/>
+          </ac:spMkLst>
+        </pc:spChg>
+        <pc:grpChg chg="add mod">
+          <ac:chgData name="Jian Zhang" userId="0ea7bc01-89b9-4a71-a707-ff7cc5b2e1ce" providerId="ADAL" clId="{E4224710-4198-523A-A356-FE8CCFEBCD2A}" dt="2026-03-20T15:35:10.663" v="454" actId="164"/>
+          <ac:grpSpMkLst>
+            <pc:docMk/>
+            <pc:sldMk cId="4227997026" sldId="259"/>
+            <ac:grpSpMk id="10" creationId="{D8991E29-0FFC-6CD0-9728-45F76ECF660E}"/>
+          </ac:grpSpMkLst>
+        </pc:grpChg>
+        <pc:picChg chg="add mod modCrop">
+          <ac:chgData name="Jian Zhang" userId="0ea7bc01-89b9-4a71-a707-ff7cc5b2e1ce" providerId="ADAL" clId="{E4224710-4198-523A-A356-FE8CCFEBCD2A}" dt="2026-03-20T15:35:10.663" v="454" actId="164"/>
+          <ac:picMkLst>
+            <pc:docMk/>
+            <pc:sldMk cId="4227997026" sldId="259"/>
+            <ac:picMk id="5" creationId="{F35AF0FF-500A-BC07-D8AE-E897F5EC34DF}"/>
+          </ac:picMkLst>
+        </pc:picChg>
+      </pc:sldChg>
+    </pc:docChg>
+  </pc:docChgLst>
+</pc:chgInfo>
+</file>
+
 <file path=ppt/slideLayouts/slideLayout1.xml><?xml version="1.0" encoding="utf-8"?>
 <p:sldLayout xmlns:a="http://schemas.openxmlformats.org/drawingml/2006/main" xmlns:r="http://schemas.openxmlformats.org/officeDocument/2006/relationships" xmlns:p="http://schemas.openxmlformats.org/presentationml/2006/main" type="title" preserve="1">
   <p:cSld name="Title Slide">
@@ -315,7 +424,7 @@
             <a:fld id="{B61BEF0D-F0BB-DE4B-95CE-6DB70DBA9567}" type="datetimeFigureOut">
               <a:rPr lang="en-US" smtClean="0"/>
               <a:pPr/>
-              <a:t>1/21/26</a:t>
+              <a:t>3/20/26</a:t>
             </a:fld>
             <a:endParaRPr lang="en-US" dirty="0"/>
           </a:p>
@@ -664,7 +773,7 @@
             <a:fld id="{B61BEF0D-F0BB-DE4B-95CE-6DB70DBA9567}" type="datetimeFigureOut">
               <a:rPr lang="en-US" dirty="0"/>
               <a:pPr/>
-              <a:t>1/21/26</a:t>
+              <a:t>3/20/26</a:t>
             </a:fld>
             <a:endParaRPr lang="en-US" dirty="0"/>
           </a:p>
@@ -1062,7 +1171,7 @@
             <a:fld id="{B61BEF0D-F0BB-DE4B-95CE-6DB70DBA9567}" type="datetimeFigureOut">
               <a:rPr lang="en-US" dirty="0"/>
               <a:pPr/>
-              <a:t>1/21/26</a:t>
+              <a:t>3/20/26</a:t>
             </a:fld>
             <a:endParaRPr lang="en-US" dirty="0"/>
           </a:p>
@@ -1395,7 +1504,7 @@
             <a:fld id="{B61BEF0D-F0BB-DE4B-95CE-6DB70DBA9567}" type="datetimeFigureOut">
               <a:rPr lang="en-US" dirty="0"/>
               <a:pPr/>
-              <a:t>1/21/26</a:t>
+              <a:t>3/20/26</a:t>
             </a:fld>
             <a:endParaRPr lang="en-US" dirty="0"/>
           </a:p>
@@ -1712,7 +1821,7 @@
             <a:fld id="{B61BEF0D-F0BB-DE4B-95CE-6DB70DBA9567}" type="datetimeFigureOut">
               <a:rPr lang="en-US" dirty="0"/>
               <a:pPr/>
-              <a:t>1/21/26</a:t>
+              <a:t>3/20/26</a:t>
             </a:fld>
             <a:endParaRPr lang="en-US" dirty="0"/>
           </a:p>
@@ -2105,7 +2214,7 @@
             <a:fld id="{B61BEF0D-F0BB-DE4B-95CE-6DB70DBA9567}" type="datetimeFigureOut">
               <a:rPr lang="en-US" dirty="0"/>
               <a:pPr/>
-              <a:t>1/21/26</a:t>
+              <a:t>3/20/26</a:t>
             </a:fld>
             <a:endParaRPr lang="en-US" dirty="0"/>
           </a:p>
@@ -2359,7 +2468,7 @@
             <a:fld id="{B61BEF0D-F0BB-DE4B-95CE-6DB70DBA9567}" type="datetimeFigureOut">
               <a:rPr lang="en-US" dirty="0"/>
               <a:pPr/>
-              <a:t>1/21/26</a:t>
+              <a:t>3/20/26</a:t>
             </a:fld>
             <a:endParaRPr lang="en-US" dirty="0"/>
           </a:p>
@@ -2618,7 +2727,7 @@
             <a:fld id="{B61BEF0D-F0BB-DE4B-95CE-6DB70DBA9567}" type="datetimeFigureOut">
               <a:rPr lang="en-US" dirty="0"/>
               <a:pPr/>
-              <a:t>1/21/26</a:t>
+              <a:t>3/20/26</a:t>
             </a:fld>
             <a:endParaRPr lang="en-US" dirty="0"/>
           </a:p>
@@ -2877,7 +2986,7 @@
             <a:fld id="{B61BEF0D-F0BB-DE4B-95CE-6DB70DBA9567}" type="datetimeFigureOut">
               <a:rPr lang="en-US" dirty="0"/>
               <a:pPr/>
-              <a:t>1/21/26</a:t>
+              <a:t>3/20/26</a:t>
             </a:fld>
             <a:endParaRPr lang="en-US" dirty="0"/>
           </a:p>
@@ -2983,6 +3092,13 @@
             <a:noFill/>
           </a:ln>
         </p:spPr>
+        <p:txBody>
+          <a:bodyPr/>
+          <a:lstStyle/>
+          <a:p>
+            <a:endParaRPr lang="en-US"/>
+          </a:p>
+        </p:txBody>
       </p:sp>
       <p:sp>
         <p:nvSpPr>
@@ -3203,7 +3319,7 @@
             <a:fld id="{B61BEF0D-F0BB-DE4B-95CE-6DB70DBA9567}" type="datetimeFigureOut">
               <a:rPr lang="en-US" dirty="0"/>
               <a:pPr/>
-              <a:t>1/21/26</a:t>
+              <a:t>3/20/26</a:t>
             </a:fld>
             <a:endParaRPr lang="en-US" dirty="0"/>
           </a:p>
@@ -3523,7 +3639,7 @@
             <a:fld id="{B61BEF0D-F0BB-DE4B-95CE-6DB70DBA9567}" type="datetimeFigureOut">
               <a:rPr lang="en-US" dirty="0"/>
               <a:pPr/>
-              <a:t>1/21/26</a:t>
+              <a:t>3/20/26</a:t>
             </a:fld>
             <a:endParaRPr lang="en-US" dirty="0"/>
           </a:p>
@@ -3977,7 +4093,7 @@
             <a:fld id="{B61BEF0D-F0BB-DE4B-95CE-6DB70DBA9567}" type="datetimeFigureOut">
               <a:rPr lang="en-US" dirty="0"/>
               <a:pPr/>
-              <a:t>1/21/26</a:t>
+              <a:t>3/20/26</a:t>
             </a:fld>
             <a:endParaRPr lang="en-US" dirty="0"/>
           </a:p>
@@ -4179,7 +4295,7 @@
             <a:fld id="{B61BEF0D-F0BB-DE4B-95CE-6DB70DBA9567}" type="datetimeFigureOut">
               <a:rPr lang="en-US" dirty="0"/>
               <a:pPr/>
-              <a:t>1/21/26</a:t>
+              <a:t>3/20/26</a:t>
             </a:fld>
             <a:endParaRPr lang="en-US" dirty="0"/>
           </a:p>
@@ -4353,7 +4469,7 @@
             <a:fld id="{B61BEF0D-F0BB-DE4B-95CE-6DB70DBA9567}" type="datetimeFigureOut">
               <a:rPr lang="en-US" dirty="0"/>
               <a:pPr/>
-              <a:t>1/21/26</a:t>
+              <a:t>3/20/26</a:t>
             </a:fld>
             <a:endParaRPr lang="en-US" dirty="0"/>
           </a:p>
@@ -4683,7 +4799,7 @@
             <a:fld id="{B61BEF0D-F0BB-DE4B-95CE-6DB70DBA9567}" type="datetimeFigureOut">
               <a:rPr lang="en-US" dirty="0"/>
               <a:pPr/>
-              <a:t>1/21/26</a:t>
+              <a:t>3/20/26</a:t>
             </a:fld>
             <a:endParaRPr lang="en-US" dirty="0"/>
           </a:p>
@@ -5025,7 +5141,7 @@
             <a:fld id="{B61BEF0D-F0BB-DE4B-95CE-6DB70DBA9567}" type="datetimeFigureOut">
               <a:rPr lang="en-US" dirty="0"/>
               <a:pPr/>
-              <a:t>1/21/26</a:t>
+              <a:t>3/20/26</a:t>
             </a:fld>
             <a:endParaRPr lang="en-US" dirty="0"/>
           </a:p>
@@ -7352,7 +7468,7 @@
             <a:fld id="{B61BEF0D-F0BB-DE4B-95CE-6DB70DBA9567}" type="datetimeFigureOut">
               <a:rPr lang="en-US" smtClean="0"/>
               <a:pPr/>
-              <a:t>1/21/26</a:t>
+              <a:t>3/20/26</a:t>
             </a:fld>
             <a:endParaRPr lang="en-US" dirty="0"/>
           </a:p>
@@ -8177,7 +8293,28 @@
           <a:bodyPr/>
           <a:lstStyle/>
           <a:p>
-            <a:endParaRPr lang="en-US" dirty="0"/>
+            <a:r>
+              <a:rPr lang="en-US" dirty="0"/>
+              <a:t>RFID enabled robot read SSCC++ encoded RFID tags</a:t>
+            </a:r>
+          </a:p>
+          <a:p>
+            <a:r>
+              <a:rPr lang="en-US" dirty="0"/>
+              <a:t>Interpret the SSCC and query information by reading EPC</a:t>
+            </a:r>
+          </a:p>
+          <a:p>
+            <a:r>
+              <a:rPr lang="en-US" dirty="0"/>
+              <a:t>Show SSCC query results</a:t>
+            </a:r>
+          </a:p>
+          <a:p>
+            <a:r>
+              <a:rPr lang="en-US" dirty="0"/>
+              <a:t>Additional actions by query results if applied.</a:t>
+            </a:r>
           </a:p>
         </p:txBody>
       </p:sp>
@@ -9082,6 +9219,676 @@
 </p:sld>
 </file>
 
+<file path=ppt/slides/slide4.xml><?xml version="1.0" encoding="utf-8"?>
+<p:sld xmlns:a="http://schemas.openxmlformats.org/drawingml/2006/main" xmlns:r="http://schemas.openxmlformats.org/officeDocument/2006/relationships" xmlns:p="http://schemas.openxmlformats.org/presentationml/2006/main">
+  <p:cSld>
+    <p:spTree>
+      <p:nvGrpSpPr>
+        <p:cNvPr id="1" name=""/>
+        <p:cNvGrpSpPr/>
+        <p:nvPr/>
+      </p:nvGrpSpPr>
+      <p:grpSpPr>
+        <a:xfrm>
+          <a:off x="0" y="0"/>
+          <a:ext cx="0" cy="0"/>
+          <a:chOff x="0" y="0"/>
+          <a:chExt cx="0" cy="0"/>
+        </a:xfrm>
+      </p:grpSpPr>
+      <p:sp>
+        <p:nvSpPr>
+          <p:cNvPr id="2" name="Title 1">
+            <a:extLst>
+              <a:ext uri="{FF2B5EF4-FFF2-40B4-BE49-F238E27FC236}">
+                <a16:creationId xmlns:a16="http://schemas.microsoft.com/office/drawing/2014/main" id="{72C39524-12CE-6E93-9CD3-4B5FBF82A2AF}"/>
+              </a:ext>
+            </a:extLst>
+          </p:cNvPr>
+          <p:cNvSpPr>
+            <a:spLocks noGrp="1"/>
+          </p:cNvSpPr>
+          <p:nvPr>
+            <p:ph type="title"/>
+          </p:nvPr>
+        </p:nvSpPr>
+        <p:spPr/>
+        <p:txBody>
+          <a:bodyPr/>
+          <a:lstStyle/>
+          <a:p>
+            <a:r>
+              <a:rPr lang="en-US" dirty="0"/>
+              <a:t>Typical Architecture of SSCC++ interpretation</a:t>
+            </a:r>
+          </a:p>
+        </p:txBody>
+      </p:sp>
+      <p:grpSp>
+        <p:nvGrpSpPr>
+          <p:cNvPr id="10" name="Group 9">
+            <a:extLst>
+              <a:ext uri="{FF2B5EF4-FFF2-40B4-BE49-F238E27FC236}">
+                <a16:creationId xmlns:a16="http://schemas.microsoft.com/office/drawing/2014/main" id="{D8991E29-0FFC-6CD0-9728-45F76ECF660E}"/>
+              </a:ext>
+            </a:extLst>
+          </p:cNvPr>
+          <p:cNvGrpSpPr/>
+          <p:nvPr/>
+        </p:nvGrpSpPr>
+        <p:grpSpPr>
+          <a:xfrm>
+            <a:off x="2589212" y="1608542"/>
+            <a:ext cx="7772400" cy="2022360"/>
+            <a:chOff x="2589212" y="1608542"/>
+            <a:chExt cx="7772400" cy="2022360"/>
+          </a:xfrm>
+        </p:grpSpPr>
+        <p:pic>
+          <p:nvPicPr>
+            <p:cNvPr id="5" name="Picture 4">
+              <a:extLst>
+                <a:ext uri="{FF2B5EF4-FFF2-40B4-BE49-F238E27FC236}">
+                  <a16:creationId xmlns:a16="http://schemas.microsoft.com/office/drawing/2014/main" id="{F35AF0FF-500A-BC07-D8AE-E897F5EC34DF}"/>
+                </a:ext>
+              </a:extLst>
+            </p:cNvPr>
+            <p:cNvPicPr>
+              <a:picLocks noChangeAspect="1"/>
+            </p:cNvPicPr>
+            <p:nvPr/>
+          </p:nvPicPr>
+          <p:blipFill>
+            <a:blip r:embed="rId2"/>
+            <a:srcRect l="-258" t="32848" r="258" b="28123"/>
+            <a:stretch>
+              <a:fillRect/>
+            </a:stretch>
+          </p:blipFill>
+          <p:spPr>
+            <a:xfrm>
+              <a:off x="2589212" y="1608542"/>
+              <a:ext cx="7772400" cy="2022360"/>
+            </a:xfrm>
+            <a:prstGeom prst="rect">
+              <a:avLst/>
+            </a:prstGeom>
+          </p:spPr>
+        </p:pic>
+        <p:sp>
+          <p:nvSpPr>
+            <p:cNvPr id="6" name="Content Placeholder 2">
+              <a:extLst>
+                <a:ext uri="{FF2B5EF4-FFF2-40B4-BE49-F238E27FC236}">
+                  <a16:creationId xmlns:a16="http://schemas.microsoft.com/office/drawing/2014/main" id="{34B46B4D-F697-18D5-38C1-B3121513EEC2}"/>
+                </a:ext>
+              </a:extLst>
+            </p:cNvPr>
+            <p:cNvSpPr txBox="1">
+              <a:spLocks/>
+            </p:cNvSpPr>
+            <p:nvPr/>
+          </p:nvSpPr>
+          <p:spPr>
+            <a:xfrm>
+              <a:off x="7900965" y="3227098"/>
+              <a:ext cx="1476642" cy="383831"/>
+            </a:xfrm>
+            <a:prstGeom prst="rect">
+              <a:avLst/>
+            </a:prstGeom>
+          </p:spPr>
+          <p:txBody>
+            <a:bodyPr vert="horz" lIns="91440" tIns="45720" rIns="91440" bIns="45720" rtlCol="0">
+              <a:normAutofit/>
+            </a:bodyPr>
+            <a:lstStyle>
+              <a:lvl1pPr marL="342900" indent="-342900" algn="l" defTabSz="457200" rtl="0" eaLnBrk="1" latinLnBrk="0" hangingPunct="1">
+                <a:spcBef>
+                  <a:spcPts val="1000"/>
+                </a:spcBef>
+                <a:spcAft>
+                  <a:spcPts val="0"/>
+                </a:spcAft>
+                <a:buClr>
+                  <a:schemeClr val="accent1"/>
+                </a:buClr>
+                <a:buFont typeface="Wingdings 3" charset="2"/>
+                <a:buChar char=""/>
+                <a:defRPr sz="1800" kern="1200">
+                  <a:solidFill>
+                    <a:schemeClr val="tx1">
+                      <a:lumMod val="75000"/>
+                      <a:lumOff val="25000"/>
+                    </a:schemeClr>
+                  </a:solidFill>
+                  <a:latin typeface="Times New Roman" panose="02020603050405020304" pitchFamily="18" charset="0"/>
+                  <a:ea typeface="+mn-ea"/>
+                  <a:cs typeface="Times New Roman" panose="02020603050405020304" pitchFamily="18" charset="0"/>
+                </a:defRPr>
+              </a:lvl1pPr>
+              <a:lvl2pPr marL="742950" indent="-285750" algn="l" defTabSz="457200" rtl="0" eaLnBrk="1" latinLnBrk="0" hangingPunct="1">
+                <a:spcBef>
+                  <a:spcPts val="1000"/>
+                </a:spcBef>
+                <a:spcAft>
+                  <a:spcPts val="0"/>
+                </a:spcAft>
+                <a:buClr>
+                  <a:schemeClr val="accent1"/>
+                </a:buClr>
+                <a:buFont typeface="Wingdings 3" charset="2"/>
+                <a:buChar char=""/>
+                <a:defRPr sz="1600" kern="1200">
+                  <a:solidFill>
+                    <a:schemeClr val="tx1">
+                      <a:lumMod val="75000"/>
+                      <a:lumOff val="25000"/>
+                    </a:schemeClr>
+                  </a:solidFill>
+                  <a:latin typeface="Times New Roman" panose="02020603050405020304" pitchFamily="18" charset="0"/>
+                  <a:ea typeface="+mn-ea"/>
+                  <a:cs typeface="Times New Roman" panose="02020603050405020304" pitchFamily="18" charset="0"/>
+                </a:defRPr>
+              </a:lvl2pPr>
+              <a:lvl3pPr marL="1143000" indent="-228600" algn="l" defTabSz="457200" rtl="0" eaLnBrk="1" latinLnBrk="0" hangingPunct="1">
+                <a:spcBef>
+                  <a:spcPts val="1000"/>
+                </a:spcBef>
+                <a:spcAft>
+                  <a:spcPts val="0"/>
+                </a:spcAft>
+                <a:buClr>
+                  <a:schemeClr val="accent1"/>
+                </a:buClr>
+                <a:buFont typeface="Wingdings 3" charset="2"/>
+                <a:buChar char=""/>
+                <a:defRPr sz="1400" kern="1200">
+                  <a:solidFill>
+                    <a:schemeClr val="tx1">
+                      <a:lumMod val="75000"/>
+                      <a:lumOff val="25000"/>
+                    </a:schemeClr>
+                  </a:solidFill>
+                  <a:latin typeface="Times New Roman" panose="02020603050405020304" pitchFamily="18" charset="0"/>
+                  <a:ea typeface="+mn-ea"/>
+                  <a:cs typeface="Times New Roman" panose="02020603050405020304" pitchFamily="18" charset="0"/>
+                </a:defRPr>
+              </a:lvl3pPr>
+              <a:lvl4pPr marL="1600200" indent="-228600" algn="l" defTabSz="457200" rtl="0" eaLnBrk="1" latinLnBrk="0" hangingPunct="1">
+                <a:spcBef>
+                  <a:spcPts val="1000"/>
+                </a:spcBef>
+                <a:spcAft>
+                  <a:spcPts val="0"/>
+                </a:spcAft>
+                <a:buClr>
+                  <a:schemeClr val="accent1"/>
+                </a:buClr>
+                <a:buFont typeface="Wingdings 3" charset="2"/>
+                <a:buChar char=""/>
+                <a:defRPr sz="1200" kern="1200">
+                  <a:solidFill>
+                    <a:schemeClr val="tx1">
+                      <a:lumMod val="75000"/>
+                      <a:lumOff val="25000"/>
+                    </a:schemeClr>
+                  </a:solidFill>
+                  <a:latin typeface="Times New Roman" panose="02020603050405020304" pitchFamily="18" charset="0"/>
+                  <a:ea typeface="+mn-ea"/>
+                  <a:cs typeface="Times New Roman" panose="02020603050405020304" pitchFamily="18" charset="0"/>
+                </a:defRPr>
+              </a:lvl4pPr>
+              <a:lvl5pPr marL="2057400" indent="-228600" algn="l" defTabSz="457200" rtl="0" eaLnBrk="1" latinLnBrk="0" hangingPunct="1">
+                <a:spcBef>
+                  <a:spcPts val="1000"/>
+                </a:spcBef>
+                <a:spcAft>
+                  <a:spcPts val="0"/>
+                </a:spcAft>
+                <a:buClr>
+                  <a:schemeClr val="accent1"/>
+                </a:buClr>
+                <a:buFont typeface="Wingdings 3" charset="2"/>
+                <a:buChar char=""/>
+                <a:defRPr sz="1200" kern="1200">
+                  <a:solidFill>
+                    <a:schemeClr val="tx1">
+                      <a:lumMod val="75000"/>
+                      <a:lumOff val="25000"/>
+                    </a:schemeClr>
+                  </a:solidFill>
+                  <a:latin typeface="Times New Roman" panose="02020603050405020304" pitchFamily="18" charset="0"/>
+                  <a:ea typeface="+mn-ea"/>
+                  <a:cs typeface="Times New Roman" panose="02020603050405020304" pitchFamily="18" charset="0"/>
+                </a:defRPr>
+              </a:lvl5pPr>
+              <a:lvl6pPr marL="2514600" indent="-228600" algn="l" defTabSz="457200" rtl="0" eaLnBrk="1" latinLnBrk="0" hangingPunct="1">
+                <a:spcBef>
+                  <a:spcPts val="1000"/>
+                </a:spcBef>
+                <a:spcAft>
+                  <a:spcPts val="0"/>
+                </a:spcAft>
+                <a:buClr>
+                  <a:schemeClr val="accent1"/>
+                </a:buClr>
+                <a:buFont typeface="Wingdings 3" charset="2"/>
+                <a:buChar char=""/>
+                <a:defRPr sz="1200" kern="1200">
+                  <a:solidFill>
+                    <a:schemeClr val="tx1">
+                      <a:lumMod val="75000"/>
+                      <a:lumOff val="25000"/>
+                    </a:schemeClr>
+                  </a:solidFill>
+                  <a:latin typeface="+mn-lt"/>
+                  <a:ea typeface="+mn-ea"/>
+                  <a:cs typeface="+mn-cs"/>
+                </a:defRPr>
+              </a:lvl6pPr>
+              <a:lvl7pPr marL="2971800" indent="-228600" algn="l" defTabSz="457200" rtl="0" eaLnBrk="1" latinLnBrk="0" hangingPunct="1">
+                <a:spcBef>
+                  <a:spcPts val="1000"/>
+                </a:spcBef>
+                <a:spcAft>
+                  <a:spcPts val="0"/>
+                </a:spcAft>
+                <a:buClr>
+                  <a:schemeClr val="accent1"/>
+                </a:buClr>
+                <a:buFont typeface="Wingdings 3" charset="2"/>
+                <a:buChar char=""/>
+                <a:defRPr sz="1200" kern="1200">
+                  <a:solidFill>
+                    <a:schemeClr val="tx1">
+                      <a:lumMod val="75000"/>
+                      <a:lumOff val="25000"/>
+                    </a:schemeClr>
+                  </a:solidFill>
+                  <a:latin typeface="+mn-lt"/>
+                  <a:ea typeface="+mn-ea"/>
+                  <a:cs typeface="+mn-cs"/>
+                </a:defRPr>
+              </a:lvl7pPr>
+              <a:lvl8pPr marL="3429000" indent="-228600" algn="l" defTabSz="457200" rtl="0" eaLnBrk="1" latinLnBrk="0" hangingPunct="1">
+                <a:spcBef>
+                  <a:spcPts val="1000"/>
+                </a:spcBef>
+                <a:spcAft>
+                  <a:spcPts val="0"/>
+                </a:spcAft>
+                <a:buClr>
+                  <a:schemeClr val="accent1"/>
+                </a:buClr>
+                <a:buFont typeface="Wingdings 3" charset="2"/>
+                <a:buChar char=""/>
+                <a:defRPr sz="1200" kern="1200">
+                  <a:solidFill>
+                    <a:schemeClr val="tx1">
+                      <a:lumMod val="75000"/>
+                      <a:lumOff val="25000"/>
+                    </a:schemeClr>
+                  </a:solidFill>
+                  <a:latin typeface="+mn-lt"/>
+                  <a:ea typeface="+mn-ea"/>
+                  <a:cs typeface="+mn-cs"/>
+                </a:defRPr>
+              </a:lvl8pPr>
+              <a:lvl9pPr marL="3886200" indent="-228600" algn="l" defTabSz="457200" rtl="0" eaLnBrk="1" latinLnBrk="0" hangingPunct="1">
+                <a:spcBef>
+                  <a:spcPts val="1000"/>
+                </a:spcBef>
+                <a:spcAft>
+                  <a:spcPts val="0"/>
+                </a:spcAft>
+                <a:buClr>
+                  <a:schemeClr val="accent1"/>
+                </a:buClr>
+                <a:buFont typeface="Wingdings 3" charset="2"/>
+                <a:buChar char=""/>
+                <a:defRPr sz="1200" kern="1200">
+                  <a:solidFill>
+                    <a:schemeClr val="tx1">
+                      <a:lumMod val="75000"/>
+                      <a:lumOff val="25000"/>
+                    </a:schemeClr>
+                  </a:solidFill>
+                  <a:latin typeface="+mn-lt"/>
+                  <a:ea typeface="+mn-ea"/>
+                  <a:cs typeface="+mn-cs"/>
+                </a:defRPr>
+              </a:lvl9pPr>
+            </a:lstStyle>
+            <a:p>
+              <a:pPr marL="0" indent="0">
+                <a:buNone/>
+              </a:pPr>
+              <a:r>
+                <a:rPr lang="en-US" sz="1600" dirty="0">
+                  <a:solidFill>
+                    <a:srgbClr val="113A68"/>
+                  </a:solidFill>
+                </a:rPr>
+                <a:t>encoded URL</a:t>
+              </a:r>
+            </a:p>
+          </p:txBody>
+        </p:sp>
+      </p:grpSp>
+      <p:sp>
+        <p:nvSpPr>
+          <p:cNvPr id="7" name="Content Placeholder 2">
+            <a:extLst>
+              <a:ext uri="{FF2B5EF4-FFF2-40B4-BE49-F238E27FC236}">
+                <a16:creationId xmlns:a16="http://schemas.microsoft.com/office/drawing/2014/main" id="{E85E7097-FABE-02F6-F8D1-334C54DDC2E5}"/>
+              </a:ext>
+            </a:extLst>
+          </p:cNvPr>
+          <p:cNvSpPr txBox="1">
+            <a:spLocks/>
+          </p:cNvSpPr>
+          <p:nvPr/>
+        </p:nvSpPr>
+        <p:spPr>
+          <a:xfrm>
+            <a:off x="2589212" y="3741377"/>
+            <a:ext cx="9112217" cy="2559305"/>
+          </a:xfrm>
+          <a:prstGeom prst="rect">
+            <a:avLst/>
+          </a:prstGeom>
+        </p:spPr>
+        <p:txBody>
+          <a:bodyPr vert="horz" lIns="91440" tIns="45720" rIns="91440" bIns="45720" rtlCol="0">
+            <a:normAutofit fontScale="92500" lnSpcReduction="10000"/>
+          </a:bodyPr>
+          <a:lstStyle>
+            <a:lvl1pPr marL="342900" indent="-342900" algn="l" defTabSz="457200" rtl="0" eaLnBrk="1" latinLnBrk="0" hangingPunct="1">
+              <a:spcBef>
+                <a:spcPts val="1000"/>
+              </a:spcBef>
+              <a:spcAft>
+                <a:spcPts val="0"/>
+              </a:spcAft>
+              <a:buClr>
+                <a:schemeClr val="accent1"/>
+              </a:buClr>
+              <a:buFont typeface="Wingdings 3" charset="2"/>
+              <a:buChar char=""/>
+              <a:defRPr sz="1800" kern="1200">
+                <a:solidFill>
+                  <a:schemeClr val="tx1">
+                    <a:lumMod val="75000"/>
+                    <a:lumOff val="25000"/>
+                  </a:schemeClr>
+                </a:solidFill>
+                <a:latin typeface="Times New Roman" panose="02020603050405020304" pitchFamily="18" charset="0"/>
+                <a:ea typeface="+mn-ea"/>
+                <a:cs typeface="Times New Roman" panose="02020603050405020304" pitchFamily="18" charset="0"/>
+              </a:defRPr>
+            </a:lvl1pPr>
+            <a:lvl2pPr marL="742950" indent="-285750" algn="l" defTabSz="457200" rtl="0" eaLnBrk="1" latinLnBrk="0" hangingPunct="1">
+              <a:spcBef>
+                <a:spcPts val="1000"/>
+              </a:spcBef>
+              <a:spcAft>
+                <a:spcPts val="0"/>
+              </a:spcAft>
+              <a:buClr>
+                <a:schemeClr val="accent1"/>
+              </a:buClr>
+              <a:buFont typeface="Wingdings 3" charset="2"/>
+              <a:buChar char=""/>
+              <a:defRPr sz="1600" kern="1200">
+                <a:solidFill>
+                  <a:schemeClr val="tx1">
+                    <a:lumMod val="75000"/>
+                    <a:lumOff val="25000"/>
+                  </a:schemeClr>
+                </a:solidFill>
+                <a:latin typeface="Times New Roman" panose="02020603050405020304" pitchFamily="18" charset="0"/>
+                <a:ea typeface="+mn-ea"/>
+                <a:cs typeface="Times New Roman" panose="02020603050405020304" pitchFamily="18" charset="0"/>
+              </a:defRPr>
+            </a:lvl2pPr>
+            <a:lvl3pPr marL="1143000" indent="-228600" algn="l" defTabSz="457200" rtl="0" eaLnBrk="1" latinLnBrk="0" hangingPunct="1">
+              <a:spcBef>
+                <a:spcPts val="1000"/>
+              </a:spcBef>
+              <a:spcAft>
+                <a:spcPts val="0"/>
+              </a:spcAft>
+              <a:buClr>
+                <a:schemeClr val="accent1"/>
+              </a:buClr>
+              <a:buFont typeface="Wingdings 3" charset="2"/>
+              <a:buChar char=""/>
+              <a:defRPr sz="1400" kern="1200">
+                <a:solidFill>
+                  <a:schemeClr val="tx1">
+                    <a:lumMod val="75000"/>
+                    <a:lumOff val="25000"/>
+                  </a:schemeClr>
+                </a:solidFill>
+                <a:latin typeface="Times New Roman" panose="02020603050405020304" pitchFamily="18" charset="0"/>
+                <a:ea typeface="+mn-ea"/>
+                <a:cs typeface="Times New Roman" panose="02020603050405020304" pitchFamily="18" charset="0"/>
+              </a:defRPr>
+            </a:lvl3pPr>
+            <a:lvl4pPr marL="1600200" indent="-228600" algn="l" defTabSz="457200" rtl="0" eaLnBrk="1" latinLnBrk="0" hangingPunct="1">
+              <a:spcBef>
+                <a:spcPts val="1000"/>
+              </a:spcBef>
+              <a:spcAft>
+                <a:spcPts val="0"/>
+              </a:spcAft>
+              <a:buClr>
+                <a:schemeClr val="accent1"/>
+              </a:buClr>
+              <a:buFont typeface="Wingdings 3" charset="2"/>
+              <a:buChar char=""/>
+              <a:defRPr sz="1200" kern="1200">
+                <a:solidFill>
+                  <a:schemeClr val="tx1">
+                    <a:lumMod val="75000"/>
+                    <a:lumOff val="25000"/>
+                  </a:schemeClr>
+                </a:solidFill>
+                <a:latin typeface="Times New Roman" panose="02020603050405020304" pitchFamily="18" charset="0"/>
+                <a:ea typeface="+mn-ea"/>
+                <a:cs typeface="Times New Roman" panose="02020603050405020304" pitchFamily="18" charset="0"/>
+              </a:defRPr>
+            </a:lvl4pPr>
+            <a:lvl5pPr marL="2057400" indent="-228600" algn="l" defTabSz="457200" rtl="0" eaLnBrk="1" latinLnBrk="0" hangingPunct="1">
+              <a:spcBef>
+                <a:spcPts val="1000"/>
+              </a:spcBef>
+              <a:spcAft>
+                <a:spcPts val="0"/>
+              </a:spcAft>
+              <a:buClr>
+                <a:schemeClr val="accent1"/>
+              </a:buClr>
+              <a:buFont typeface="Wingdings 3" charset="2"/>
+              <a:buChar char=""/>
+              <a:defRPr sz="1200" kern="1200">
+                <a:solidFill>
+                  <a:schemeClr val="tx1">
+                    <a:lumMod val="75000"/>
+                    <a:lumOff val="25000"/>
+                  </a:schemeClr>
+                </a:solidFill>
+                <a:latin typeface="Times New Roman" panose="02020603050405020304" pitchFamily="18" charset="0"/>
+                <a:ea typeface="+mn-ea"/>
+                <a:cs typeface="Times New Roman" panose="02020603050405020304" pitchFamily="18" charset="0"/>
+              </a:defRPr>
+            </a:lvl5pPr>
+            <a:lvl6pPr marL="2514600" indent="-228600" algn="l" defTabSz="457200" rtl="0" eaLnBrk="1" latinLnBrk="0" hangingPunct="1">
+              <a:spcBef>
+                <a:spcPts val="1000"/>
+              </a:spcBef>
+              <a:spcAft>
+                <a:spcPts val="0"/>
+              </a:spcAft>
+              <a:buClr>
+                <a:schemeClr val="accent1"/>
+              </a:buClr>
+              <a:buFont typeface="Wingdings 3" charset="2"/>
+              <a:buChar char=""/>
+              <a:defRPr sz="1200" kern="1200">
+                <a:solidFill>
+                  <a:schemeClr val="tx1">
+                    <a:lumMod val="75000"/>
+                    <a:lumOff val="25000"/>
+                  </a:schemeClr>
+                </a:solidFill>
+                <a:latin typeface="+mn-lt"/>
+                <a:ea typeface="+mn-ea"/>
+                <a:cs typeface="+mn-cs"/>
+              </a:defRPr>
+            </a:lvl6pPr>
+            <a:lvl7pPr marL="2971800" indent="-228600" algn="l" defTabSz="457200" rtl="0" eaLnBrk="1" latinLnBrk="0" hangingPunct="1">
+              <a:spcBef>
+                <a:spcPts val="1000"/>
+              </a:spcBef>
+              <a:spcAft>
+                <a:spcPts val="0"/>
+              </a:spcAft>
+              <a:buClr>
+                <a:schemeClr val="accent1"/>
+              </a:buClr>
+              <a:buFont typeface="Wingdings 3" charset="2"/>
+              <a:buChar char=""/>
+              <a:defRPr sz="1200" kern="1200">
+                <a:solidFill>
+                  <a:schemeClr val="tx1">
+                    <a:lumMod val="75000"/>
+                    <a:lumOff val="25000"/>
+                  </a:schemeClr>
+                </a:solidFill>
+                <a:latin typeface="+mn-lt"/>
+                <a:ea typeface="+mn-ea"/>
+                <a:cs typeface="+mn-cs"/>
+              </a:defRPr>
+            </a:lvl7pPr>
+            <a:lvl8pPr marL="3429000" indent="-228600" algn="l" defTabSz="457200" rtl="0" eaLnBrk="1" latinLnBrk="0" hangingPunct="1">
+              <a:spcBef>
+                <a:spcPts val="1000"/>
+              </a:spcBef>
+              <a:spcAft>
+                <a:spcPts val="0"/>
+              </a:spcAft>
+              <a:buClr>
+                <a:schemeClr val="accent1"/>
+              </a:buClr>
+              <a:buFont typeface="Wingdings 3" charset="2"/>
+              <a:buChar char=""/>
+              <a:defRPr sz="1200" kern="1200">
+                <a:solidFill>
+                  <a:schemeClr val="tx1">
+                    <a:lumMod val="75000"/>
+                    <a:lumOff val="25000"/>
+                  </a:schemeClr>
+                </a:solidFill>
+                <a:latin typeface="+mn-lt"/>
+                <a:ea typeface="+mn-ea"/>
+                <a:cs typeface="+mn-cs"/>
+              </a:defRPr>
+            </a:lvl8pPr>
+            <a:lvl9pPr marL="3886200" indent="-228600" algn="l" defTabSz="457200" rtl="0" eaLnBrk="1" latinLnBrk="0" hangingPunct="1">
+              <a:spcBef>
+                <a:spcPts val="1000"/>
+              </a:spcBef>
+              <a:spcAft>
+                <a:spcPts val="0"/>
+              </a:spcAft>
+              <a:buClr>
+                <a:schemeClr val="accent1"/>
+              </a:buClr>
+              <a:buFont typeface="Wingdings 3" charset="2"/>
+              <a:buChar char=""/>
+              <a:defRPr sz="1200" kern="1200">
+                <a:solidFill>
+                  <a:schemeClr val="tx1">
+                    <a:lumMod val="75000"/>
+                    <a:lumOff val="25000"/>
+                  </a:schemeClr>
+                </a:solidFill>
+                <a:latin typeface="+mn-lt"/>
+                <a:ea typeface="+mn-ea"/>
+                <a:cs typeface="+mn-cs"/>
+              </a:defRPr>
+            </a:lvl9pPr>
+          </a:lstStyle>
+          <a:p>
+            <a:pPr marL="0" indent="0">
+              <a:lnSpc>
+                <a:spcPct val="128000"/>
+              </a:lnSpc>
+              <a:buNone/>
+            </a:pPr>
+            <a:r>
+              <a:rPr lang="en-US" dirty="0"/>
+              <a:t>The typical data flow of interpret SSCC++ is SSCC++encoded tags </a:t>
+            </a:r>
+            <a:r>
+              <a:rPr lang="en-US" dirty="0">
+                <a:sym typeface="Wingdings" pitchFamily="2" charset="2"/>
+              </a:rPr>
+              <a:t> RFID reader  EPC  interpret EPC to gain SSCC value  send Web call by SSCC value encoded URL  Get value:</a:t>
+            </a:r>
+          </a:p>
+          <a:p>
+            <a:pPr fontAlgn="base"/>
+            <a:r>
+              <a:rPr lang="en-US" dirty="0"/>
+              <a:t>SSCC++ encoded tags: Physical RFID tags encoded with SSCC++.​</a:t>
+            </a:r>
+          </a:p>
+          <a:p>
+            <a:pPr fontAlgn="base"/>
+            <a:r>
+              <a:rPr lang="en-US" dirty="0"/>
+              <a:t>RFID reader: Captures EPC from the tags.​</a:t>
+            </a:r>
+          </a:p>
+          <a:p>
+            <a:pPr fontAlgn="base"/>
+            <a:r>
+              <a:rPr lang="en-US" dirty="0"/>
+              <a:t>EPC interpretation: Convert EPC to SSCC value.​</a:t>
+            </a:r>
+          </a:p>
+          <a:p>
+            <a:pPr fontAlgn="base"/>
+            <a:r>
+              <a:rPr lang="en-US" dirty="0"/>
+              <a:t> Web call: Construct URL with encoded SSCC.​</a:t>
+            </a:r>
+          </a:p>
+          <a:p>
+            <a:pPr fontAlgn="base"/>
+            <a:r>
+              <a:rPr lang="en-US" dirty="0"/>
+              <a:t> Response: Retrieve associated data to drive robot actions.​</a:t>
+            </a:r>
+          </a:p>
+        </p:txBody>
+      </p:sp>
+    </p:spTree>
+    <p:extLst>
+      <p:ext uri="{BB962C8B-B14F-4D97-AF65-F5344CB8AC3E}">
+        <p14:creationId xmlns:p14="http://schemas.microsoft.com/office/powerpoint/2010/main" val="4227997026"/>
+      </p:ext>
+    </p:extLst>
+  </p:cSld>
+  <p:clrMapOvr>
+    <a:masterClrMapping/>
+  </p:clrMapOvr>
+</p:sld>
+</file>
+
 <file path=ppt/theme/theme1.xml><?xml version="1.0" encoding="utf-8"?>
 <a:theme xmlns:a="http://schemas.openxmlformats.org/drawingml/2006/main" name="Wisp">
   <a:themeElements>
